--- a/slides/release/00__about.pptx
+++ b/slides/release/00__about.pptx
@@ -2619,6 +2619,7 @@
           <a:p/>
           <a:p/>
           <a:p/>
+          <a:p/>
         </p:txBody>
       </p:sp>
       <p:sp>
@@ -2664,7 +2665,7 @@
         </p:nvGraphicFramePr>
         <p:xfrm>
           <a:off x="237744" y="914400"/>
-          <a:ext cx="8915400" cy="5029200"/>
+          <a:ext cx="8915400" cy="5486400"/>
         </p:xfrm>
         <a:graphic>
           <a:graphicData uri="http://schemas.openxmlformats.org/drawingml/2006/table">
@@ -2956,6 +2957,32 @@
                     <a:p>
                       <a:r>
                         <a:t>Building a Layered AI Defense</a:t>
+                      </a:r>
+                    </a:p>
+                  </a:txBody>
+                  <a:tcPr/>
+                </a:tc>
+              </a:tr>
+              <a:tr h="457200">
+                <a:tc>
+                  <a:txBody>
+                    <a:bodyPr/>
+                    <a:lstStyle/>
+                    <a:p>
+                      <a:r>
+                        <a:t>11</a:t>
+                      </a:r>
+                    </a:p>
+                  </a:txBody>
+                  <a:tcPr/>
+                </a:tc>
+                <a:tc>
+                  <a:txBody>
+                    <a:bodyPr/>
+                    <a:lstStyle/>
+                    <a:p>
+                      <a:r>
+                        <a:t>AI for Defense: From Findings to Verified Fixes</a:t>
                       </a:r>
                     </a:p>
                   </a:txBody>
